--- a/Big Data/Doc/Big_Data_IoT_AI.pptx
+++ b/Big Data/Doc/Big_Data_IoT_AI.pptx
@@ -16553,7 +16553,7 @@
         </p:nvSpPr>
         <p:spPr>
           <a:xfrm>
-            <a:off x="457200" y="1920240"/>
+            <a:off x="457200" y="2647093"/>
             <a:ext cx="5303520" cy="365760"/>
           </a:xfrm>
           <a:prstGeom prst="rect">
@@ -16592,7 +16592,7 @@
         </p:nvSpPr>
         <p:spPr>
           <a:xfrm>
-            <a:off x="457200" y="1920240"/>
+            <a:off x="457200" y="2285999"/>
             <a:ext cx="5303520" cy="365760"/>
           </a:xfrm>
           <a:prstGeom prst="rect">
@@ -16618,6 +16618,7 @@
               </a:defRPr>
             </a:pPr>
             <a:r>
+              <a:rPr dirty="0"/>
               <a:t>▸  Predictive analytics for automation</a:t>
             </a:r>
           </a:p>
@@ -16631,7 +16632,7 @@
         </p:nvSpPr>
         <p:spPr>
           <a:xfrm>
-            <a:off x="457200" y="3566160"/>
+            <a:off x="457200" y="3225800"/>
             <a:ext cx="5303520" cy="365760"/>
           </a:xfrm>
           <a:prstGeom prst="rect">
@@ -16654,6 +16655,7 @@
               </a:defRPr>
             </a:pPr>
             <a:r>
+              <a:rPr dirty="0"/>
               <a:t>⚙️ Functional Requirements</a:t>
             </a:r>
           </a:p>
@@ -16667,7 +16669,7 @@
         </p:nvSpPr>
         <p:spPr>
           <a:xfrm>
-            <a:off x="457200" y="3931920"/>
+            <a:off x="457200" y="3894390"/>
             <a:ext cx="5303520" cy="365760"/>
           </a:xfrm>
           <a:prstGeom prst="rect">
@@ -16693,6 +16695,7 @@
               </a:defRPr>
             </a:pPr>
             <a:r>
+              <a:rPr dirty="0"/>
               <a:t>▸  Data ingestion from ESP32 sensors</a:t>
             </a:r>
           </a:p>
@@ -16706,7 +16709,7 @@
         </p:nvSpPr>
         <p:spPr>
           <a:xfrm>
-            <a:off x="457200" y="3931920"/>
+            <a:off x="457200" y="3567767"/>
             <a:ext cx="5303520" cy="365760"/>
           </a:xfrm>
           <a:prstGeom prst="rect">
@@ -16732,6 +16735,7 @@
               </a:defRPr>
             </a:pPr>
             <a:r>
+              <a:rPr dirty="0"/>
               <a:t>▸  Data preprocessing and cleaning</a:t>
             </a:r>
           </a:p>
@@ -16745,7 +16749,7 @@
         </p:nvSpPr>
         <p:spPr>
           <a:xfrm>
-            <a:off x="457200" y="3931920"/>
+            <a:off x="457200" y="4518090"/>
             <a:ext cx="5303520" cy="365760"/>
           </a:xfrm>
           <a:prstGeom prst="rect">
@@ -16771,6 +16775,7 @@
               </a:defRPr>
             </a:pPr>
             <a:r>
+              <a:rPr dirty="0"/>
               <a:t>▸  Clustering and classification models</a:t>
             </a:r>
           </a:p>
@@ -16784,7 +16789,7 @@
         </p:nvSpPr>
         <p:spPr>
           <a:xfrm>
-            <a:off x="457200" y="3931921"/>
+            <a:off x="457200" y="4206240"/>
             <a:ext cx="5303520" cy="365760"/>
           </a:xfrm>
           <a:prstGeom prst="rect">
@@ -16810,6 +16815,7 @@
               </a:defRPr>
             </a:pPr>
             <a:r>
+              <a:rPr dirty="0"/>
               <a:t>▸  Visualization and reporting</a:t>
             </a:r>
           </a:p>
@@ -16898,7 +16904,7 @@
         </p:nvSpPr>
         <p:spPr>
           <a:xfrm>
-            <a:off x="6400800" y="1920240"/>
+            <a:off x="6400800" y="2651760"/>
             <a:ext cx="5303520" cy="365760"/>
           </a:xfrm>
           <a:prstGeom prst="rect">
@@ -16924,6 +16930,7 @@
               </a:defRPr>
             </a:pPr>
             <a:r>
+              <a:rPr dirty="0"/>
               <a:t>▸  Low latency real-time processing</a:t>
             </a:r>
           </a:p>
@@ -16937,7 +16944,7 @@
         </p:nvSpPr>
         <p:spPr>
           <a:xfrm>
-            <a:off x="6400800" y="1920240"/>
+            <a:off x="6400800" y="2286000"/>
             <a:ext cx="5303520" cy="365760"/>
           </a:xfrm>
           <a:prstGeom prst="rect">
@@ -16963,6 +16970,7 @@
               </a:defRPr>
             </a:pPr>
             <a:r>
+              <a:rPr dirty="0"/>
               <a:t>▸  Secure data storage</a:t>
             </a:r>
           </a:p>
@@ -16976,7 +16984,7 @@
         </p:nvSpPr>
         <p:spPr>
           <a:xfrm>
-            <a:off x="6400800" y="3566160"/>
+            <a:off x="6400800" y="3360420"/>
             <a:ext cx="5303520" cy="365760"/>
           </a:xfrm>
           <a:prstGeom prst="rect">
@@ -16999,6 +17007,7 @@
               </a:defRPr>
             </a:pPr>
             <a:r>
+              <a:rPr dirty="0"/>
               <a:t>🎯 Use Cases</a:t>
             </a:r>
           </a:p>
@@ -17051,7 +17060,7 @@
         </p:nvSpPr>
         <p:spPr>
           <a:xfrm>
-            <a:off x="6400800" y="3931920"/>
+            <a:off x="6400800" y="4222569"/>
             <a:ext cx="5303520" cy="365760"/>
           </a:xfrm>
           <a:prstGeom prst="rect">
@@ -17077,6 +17086,7 @@
               </a:defRPr>
             </a:pPr>
             <a:r>
+              <a:rPr dirty="0"/>
               <a:t>▸  Gas leak detection and alerts</a:t>
             </a:r>
           </a:p>
@@ -17090,7 +17100,7 @@
         </p:nvSpPr>
         <p:spPr>
           <a:xfrm>
-            <a:off x="6400800" y="3931920"/>
+            <a:off x="6400800" y="4513217"/>
             <a:ext cx="5303520" cy="365760"/>
           </a:xfrm>
           <a:prstGeom prst="rect">
@@ -17116,6 +17126,7 @@
               </a:defRPr>
             </a:pPr>
             <a:r>
+              <a:rPr dirty="0"/>
               <a:t>▸  Motion monitoring and security</a:t>
             </a:r>
           </a:p>
